--- a/PPTX/Card2026.pptx
+++ b/PPTX/Card2026.pptx
@@ -7,6 +7,7 @@
   <p:sldIdLst>
     <p:sldId id="256" r:id="rId2"/>
     <p:sldId id="257" r:id="rId3"/>
+    <p:sldId id="258" r:id="rId4"/>
   </p:sldIdLst>
   <p:sldSz cx="12192000" cy="6858000"/>
   <p:notesSz cx="6858000" cy="9144000"/>
@@ -105,6 +106,11 @@
       </a:defRPr>
     </a:lvl9pPr>
   </p:defaultTextStyle>
+  <p:extLst>
+    <p:ext uri="{EFAFB233-063F-42B5-8137-9DF3F51BA10A}">
+      <p15:sldGuideLst xmlns:p15="http://schemas.microsoft.com/office/powerpoint/2012/main"/>
+    </p:ext>
+  </p:extLst>
 </p:presentation>
 </file>
 
@@ -257,7 +263,7 @@
           <a:p>
             <a:fld id="{1AF6E655-73BE-475C-A322-465F16C35255}" type="datetimeFigureOut">
               <a:rPr kumimoji="1" lang="ja-JP" altLang="en-US" smtClean="0"/>
-              <a:t>2026/6/10</a:t>
+              <a:t>2026/6/22</a:t>
             </a:fld>
             <a:endParaRPr kumimoji="1" lang="ja-JP" altLang="en-US"/>
           </a:p>
@@ -457,7 +463,7 @@
           <a:p>
             <a:fld id="{1AF6E655-73BE-475C-A322-465F16C35255}" type="datetimeFigureOut">
               <a:rPr kumimoji="1" lang="ja-JP" altLang="en-US" smtClean="0"/>
-              <a:t>2026/6/10</a:t>
+              <a:t>2026/6/22</a:t>
             </a:fld>
             <a:endParaRPr kumimoji="1" lang="ja-JP" altLang="en-US"/>
           </a:p>
@@ -667,7 +673,7 @@
           <a:p>
             <a:fld id="{1AF6E655-73BE-475C-A322-465F16C35255}" type="datetimeFigureOut">
               <a:rPr kumimoji="1" lang="ja-JP" altLang="en-US" smtClean="0"/>
-              <a:t>2026/6/10</a:t>
+              <a:t>2026/6/22</a:t>
             </a:fld>
             <a:endParaRPr kumimoji="1" lang="ja-JP" altLang="en-US"/>
           </a:p>
@@ -867,7 +873,7 @@
           <a:p>
             <a:fld id="{1AF6E655-73BE-475C-A322-465F16C35255}" type="datetimeFigureOut">
               <a:rPr kumimoji="1" lang="ja-JP" altLang="en-US" smtClean="0"/>
-              <a:t>2026/6/10</a:t>
+              <a:t>2026/6/22</a:t>
             </a:fld>
             <a:endParaRPr kumimoji="1" lang="ja-JP" altLang="en-US"/>
           </a:p>
@@ -1143,7 +1149,7 @@
           <a:p>
             <a:fld id="{1AF6E655-73BE-475C-A322-465F16C35255}" type="datetimeFigureOut">
               <a:rPr kumimoji="1" lang="ja-JP" altLang="en-US" smtClean="0"/>
-              <a:t>2026/6/10</a:t>
+              <a:t>2026/6/22</a:t>
             </a:fld>
             <a:endParaRPr kumimoji="1" lang="ja-JP" altLang="en-US"/>
           </a:p>
@@ -1411,7 +1417,7 @@
           <a:p>
             <a:fld id="{1AF6E655-73BE-475C-A322-465F16C35255}" type="datetimeFigureOut">
               <a:rPr kumimoji="1" lang="ja-JP" altLang="en-US" smtClean="0"/>
-              <a:t>2026/6/10</a:t>
+              <a:t>2026/6/22</a:t>
             </a:fld>
             <a:endParaRPr kumimoji="1" lang="ja-JP" altLang="en-US"/>
           </a:p>
@@ -1826,7 +1832,7 @@
           <a:p>
             <a:fld id="{1AF6E655-73BE-475C-A322-465F16C35255}" type="datetimeFigureOut">
               <a:rPr kumimoji="1" lang="ja-JP" altLang="en-US" smtClean="0"/>
-              <a:t>2026/6/10</a:t>
+              <a:t>2026/6/22</a:t>
             </a:fld>
             <a:endParaRPr kumimoji="1" lang="ja-JP" altLang="en-US"/>
           </a:p>
@@ -1968,7 +1974,7 @@
           <a:p>
             <a:fld id="{1AF6E655-73BE-475C-A322-465F16C35255}" type="datetimeFigureOut">
               <a:rPr kumimoji="1" lang="ja-JP" altLang="en-US" smtClean="0"/>
-              <a:t>2026/6/10</a:t>
+              <a:t>2026/6/22</a:t>
             </a:fld>
             <a:endParaRPr kumimoji="1" lang="ja-JP" altLang="en-US"/>
           </a:p>
@@ -2081,7 +2087,7 @@
           <a:p>
             <a:fld id="{1AF6E655-73BE-475C-A322-465F16C35255}" type="datetimeFigureOut">
               <a:rPr kumimoji="1" lang="ja-JP" altLang="en-US" smtClean="0"/>
-              <a:t>2026/6/10</a:t>
+              <a:t>2026/6/22</a:t>
             </a:fld>
             <a:endParaRPr kumimoji="1" lang="ja-JP" altLang="en-US"/>
           </a:p>
@@ -2394,7 +2400,7 @@
           <a:p>
             <a:fld id="{1AF6E655-73BE-475C-A322-465F16C35255}" type="datetimeFigureOut">
               <a:rPr kumimoji="1" lang="ja-JP" altLang="en-US" smtClean="0"/>
-              <a:t>2026/6/10</a:t>
+              <a:t>2026/6/22</a:t>
             </a:fld>
             <a:endParaRPr kumimoji="1" lang="ja-JP" altLang="en-US"/>
           </a:p>
@@ -2683,7 +2689,7 @@
           <a:p>
             <a:fld id="{1AF6E655-73BE-475C-A322-465F16C35255}" type="datetimeFigureOut">
               <a:rPr kumimoji="1" lang="ja-JP" altLang="en-US" smtClean="0"/>
-              <a:t>2026/6/10</a:t>
+              <a:t>2026/6/22</a:t>
             </a:fld>
             <a:endParaRPr kumimoji="1" lang="ja-JP" altLang="en-US"/>
           </a:p>
@@ -2926,7 +2932,7 @@
           <a:p>
             <a:fld id="{1AF6E655-73BE-475C-A322-465F16C35255}" type="datetimeFigureOut">
               <a:rPr kumimoji="1" lang="ja-JP" altLang="en-US" smtClean="0"/>
-              <a:t>2026/6/10</a:t>
+              <a:t>2026/6/22</a:t>
             </a:fld>
             <a:endParaRPr kumimoji="1" lang="ja-JP" altLang="en-US"/>
           </a:p>
@@ -4353,6 +4359,121 @@
     <p:extLst>
       <p:ext uri="{BB962C8B-B14F-4D97-AF65-F5344CB8AC3E}">
         <p14:creationId xmlns:p14="http://schemas.microsoft.com/office/powerpoint/2010/main" val="4041938618"/>
+      </p:ext>
+    </p:extLst>
+  </p:cSld>
+  <p:clrMapOvr>
+    <a:masterClrMapping/>
+  </p:clrMapOvr>
+</p:sld>
+</file>
+
+<file path=ppt/slides/slide3.xml><?xml version="1.0" encoding="utf-8"?>
+<p:sld xmlns:a="http://schemas.openxmlformats.org/drawingml/2006/main" xmlns:r="http://schemas.openxmlformats.org/officeDocument/2006/relationships" xmlns:p="http://schemas.openxmlformats.org/presentationml/2006/main">
+  <p:cSld>
+    <p:spTree>
+      <p:nvGrpSpPr>
+        <p:cNvPr id="1" name=""/>
+        <p:cNvGrpSpPr/>
+        <p:nvPr/>
+      </p:nvGrpSpPr>
+      <p:grpSpPr>
+        <a:xfrm>
+          <a:off x="0" y="0"/>
+          <a:ext cx="0" cy="0"/>
+          <a:chOff x="0" y="0"/>
+          <a:chExt cx="0" cy="0"/>
+        </a:xfrm>
+      </p:grpSpPr>
+      <p:sp>
+        <p:nvSpPr>
+          <p:cNvPr id="2" name="Title 1">
+            <a:extLst>
+              <a:ext uri="{FF2B5EF4-FFF2-40B4-BE49-F238E27FC236}">
+                <a16:creationId xmlns:a16="http://schemas.microsoft.com/office/drawing/2014/main" id="{903D7578-C7AB-615D-31A5-D51B8CDDAB78}"/>
+              </a:ext>
+            </a:extLst>
+          </p:cNvPr>
+          <p:cNvSpPr>
+            <a:spLocks noGrp="1"/>
+          </p:cNvSpPr>
+          <p:nvPr>
+            <p:ph type="title"/>
+          </p:nvPr>
+        </p:nvSpPr>
+        <p:spPr/>
+        <p:txBody>
+          <a:bodyPr/>
+          <a:lstStyle/>
+          <a:p>
+            <a:endParaRPr kumimoji="1" lang="ja-JP" altLang="en-US"/>
+          </a:p>
+        </p:txBody>
+      </p:sp>
+      <p:pic>
+        <p:nvPicPr>
+          <p:cNvPr id="4" name="Picture 3">
+            <a:extLst>
+              <a:ext uri="{FF2B5EF4-FFF2-40B4-BE49-F238E27FC236}">
+                <a16:creationId xmlns:a16="http://schemas.microsoft.com/office/drawing/2014/main" id="{8A3520E1-E08A-352B-00AE-CFBA5343A490}"/>
+              </a:ext>
+            </a:extLst>
+          </p:cNvPr>
+          <p:cNvPicPr>
+            <a:picLocks noChangeAspect="1"/>
+          </p:cNvPicPr>
+          <p:nvPr/>
+        </p:nvPicPr>
+        <p:blipFill>
+          <a:blip r:embed="rId2"/>
+          <a:stretch>
+            <a:fillRect/>
+          </a:stretch>
+        </p:blipFill>
+        <p:spPr>
+          <a:xfrm>
+            <a:off x="63770" y="809942"/>
+            <a:ext cx="5506865" cy="5396865"/>
+          </a:xfrm>
+          <a:prstGeom prst="rect">
+            <a:avLst/>
+          </a:prstGeom>
+        </p:spPr>
+      </p:pic>
+      <p:pic>
+        <p:nvPicPr>
+          <p:cNvPr id="6" name="Picture 5">
+            <a:extLst>
+              <a:ext uri="{FF2B5EF4-FFF2-40B4-BE49-F238E27FC236}">
+                <a16:creationId xmlns:a16="http://schemas.microsoft.com/office/drawing/2014/main" id="{26C39EEF-7948-7AE9-CFF0-8E81E2C32F36}"/>
+              </a:ext>
+            </a:extLst>
+          </p:cNvPr>
+          <p:cNvPicPr>
+            <a:picLocks noChangeAspect="1"/>
+          </p:cNvPicPr>
+          <p:nvPr/>
+        </p:nvPicPr>
+        <p:blipFill>
+          <a:blip r:embed="rId3"/>
+          <a:stretch>
+            <a:fillRect/>
+          </a:stretch>
+        </p:blipFill>
+        <p:spPr>
+          <a:xfrm>
+            <a:off x="5902960" y="809942"/>
+            <a:ext cx="6147885" cy="5396865"/>
+          </a:xfrm>
+          <a:prstGeom prst="rect">
+            <a:avLst/>
+          </a:prstGeom>
+        </p:spPr>
+      </p:pic>
+    </p:spTree>
+    <p:extLst>
+      <p:ext uri="{BB962C8B-B14F-4D97-AF65-F5344CB8AC3E}">
+        <p14:creationId xmlns:p14="http://schemas.microsoft.com/office/powerpoint/2010/main" val="403768046"/>
       </p:ext>
     </p:extLst>
   </p:cSld>

--- a/PPTX/Card2026.pptx
+++ b/PPTX/Card2026.pptx
@@ -6,8 +6,9 @@
   </p:sldMasterIdLst>
   <p:sldIdLst>
     <p:sldId id="256" r:id="rId2"/>
-    <p:sldId id="257" r:id="rId3"/>
-    <p:sldId id="258" r:id="rId4"/>
+    <p:sldId id="259" r:id="rId3"/>
+    <p:sldId id="257" r:id="rId4"/>
+    <p:sldId id="258" r:id="rId5"/>
   </p:sldIdLst>
   <p:sldSz cx="12192000" cy="6858000"/>
   <p:notesSz cx="6858000" cy="9144000"/>
@@ -263,7 +264,7 @@
           <a:p>
             <a:fld id="{1AF6E655-73BE-475C-A322-465F16C35255}" type="datetimeFigureOut">
               <a:rPr kumimoji="1" lang="ja-JP" altLang="en-US" smtClean="0"/>
-              <a:t>2026/6/22</a:t>
+              <a:t>2026/9/11</a:t>
             </a:fld>
             <a:endParaRPr kumimoji="1" lang="ja-JP" altLang="en-US"/>
           </a:p>
@@ -463,7 +464,7 @@
           <a:p>
             <a:fld id="{1AF6E655-73BE-475C-A322-465F16C35255}" type="datetimeFigureOut">
               <a:rPr kumimoji="1" lang="ja-JP" altLang="en-US" smtClean="0"/>
-              <a:t>2026/6/22</a:t>
+              <a:t>2026/9/11</a:t>
             </a:fld>
             <a:endParaRPr kumimoji="1" lang="ja-JP" altLang="en-US"/>
           </a:p>
@@ -673,7 +674,7 @@
           <a:p>
             <a:fld id="{1AF6E655-73BE-475C-A322-465F16C35255}" type="datetimeFigureOut">
               <a:rPr kumimoji="1" lang="ja-JP" altLang="en-US" smtClean="0"/>
-              <a:t>2026/6/22</a:t>
+              <a:t>2026/9/11</a:t>
             </a:fld>
             <a:endParaRPr kumimoji="1" lang="ja-JP" altLang="en-US"/>
           </a:p>
@@ -873,7 +874,7 @@
           <a:p>
             <a:fld id="{1AF6E655-73BE-475C-A322-465F16C35255}" type="datetimeFigureOut">
               <a:rPr kumimoji="1" lang="ja-JP" altLang="en-US" smtClean="0"/>
-              <a:t>2026/6/22</a:t>
+              <a:t>2026/9/11</a:t>
             </a:fld>
             <a:endParaRPr kumimoji="1" lang="ja-JP" altLang="en-US"/>
           </a:p>
@@ -1149,7 +1150,7 @@
           <a:p>
             <a:fld id="{1AF6E655-73BE-475C-A322-465F16C35255}" type="datetimeFigureOut">
               <a:rPr kumimoji="1" lang="ja-JP" altLang="en-US" smtClean="0"/>
-              <a:t>2026/6/22</a:t>
+              <a:t>2026/9/11</a:t>
             </a:fld>
             <a:endParaRPr kumimoji="1" lang="ja-JP" altLang="en-US"/>
           </a:p>
@@ -1417,7 +1418,7 @@
           <a:p>
             <a:fld id="{1AF6E655-73BE-475C-A322-465F16C35255}" type="datetimeFigureOut">
               <a:rPr kumimoji="1" lang="ja-JP" altLang="en-US" smtClean="0"/>
-              <a:t>2026/6/22</a:t>
+              <a:t>2026/9/11</a:t>
             </a:fld>
             <a:endParaRPr kumimoji="1" lang="ja-JP" altLang="en-US"/>
           </a:p>
@@ -1832,7 +1833,7 @@
           <a:p>
             <a:fld id="{1AF6E655-73BE-475C-A322-465F16C35255}" type="datetimeFigureOut">
               <a:rPr kumimoji="1" lang="ja-JP" altLang="en-US" smtClean="0"/>
-              <a:t>2026/6/22</a:t>
+              <a:t>2026/9/11</a:t>
             </a:fld>
             <a:endParaRPr kumimoji="1" lang="ja-JP" altLang="en-US"/>
           </a:p>
@@ -1974,7 +1975,7 @@
           <a:p>
             <a:fld id="{1AF6E655-73BE-475C-A322-465F16C35255}" type="datetimeFigureOut">
               <a:rPr kumimoji="1" lang="ja-JP" altLang="en-US" smtClean="0"/>
-              <a:t>2026/6/22</a:t>
+              <a:t>2026/9/11</a:t>
             </a:fld>
             <a:endParaRPr kumimoji="1" lang="ja-JP" altLang="en-US"/>
           </a:p>
@@ -2087,7 +2088,7 @@
           <a:p>
             <a:fld id="{1AF6E655-73BE-475C-A322-465F16C35255}" type="datetimeFigureOut">
               <a:rPr kumimoji="1" lang="ja-JP" altLang="en-US" smtClean="0"/>
-              <a:t>2026/6/22</a:t>
+              <a:t>2026/9/11</a:t>
             </a:fld>
             <a:endParaRPr kumimoji="1" lang="ja-JP" altLang="en-US"/>
           </a:p>
@@ -2400,7 +2401,7 @@
           <a:p>
             <a:fld id="{1AF6E655-73BE-475C-A322-465F16C35255}" type="datetimeFigureOut">
               <a:rPr kumimoji="1" lang="ja-JP" altLang="en-US" smtClean="0"/>
-              <a:t>2026/6/22</a:t>
+              <a:t>2026/9/11</a:t>
             </a:fld>
             <a:endParaRPr kumimoji="1" lang="ja-JP" altLang="en-US"/>
           </a:p>
@@ -2689,7 +2690,7 @@
           <a:p>
             <a:fld id="{1AF6E655-73BE-475C-A322-465F16C35255}" type="datetimeFigureOut">
               <a:rPr kumimoji="1" lang="ja-JP" altLang="en-US" smtClean="0"/>
-              <a:t>2026/6/22</a:t>
+              <a:t>2026/9/11</a:t>
             </a:fld>
             <a:endParaRPr kumimoji="1" lang="ja-JP" altLang="en-US"/>
           </a:p>
@@ -2932,7 +2933,7 @@
           <a:p>
             <a:fld id="{1AF6E655-73BE-475C-A322-465F16C35255}" type="datetimeFigureOut">
               <a:rPr kumimoji="1" lang="ja-JP" altLang="en-US" smtClean="0"/>
-              <a:t>2026/6/22</a:t>
+              <a:t>2026/9/11</a:t>
             </a:fld>
             <a:endParaRPr kumimoji="1" lang="ja-JP" altLang="en-US"/>
           </a:p>
@@ -3865,6 +3866,156 @@
           <a:chExt cx="0" cy="0"/>
         </a:xfrm>
       </p:grpSpPr>
+      <p:pic>
+        <p:nvPicPr>
+          <p:cNvPr id="8" name="Picture 7">
+            <a:extLst>
+              <a:ext uri="{FF2B5EF4-FFF2-40B4-BE49-F238E27FC236}">
+                <a16:creationId xmlns:a16="http://schemas.microsoft.com/office/drawing/2014/main" id="{161AD8D0-CE3B-F570-FFBB-4922B009FD8C}"/>
+              </a:ext>
+            </a:extLst>
+          </p:cNvPr>
+          <p:cNvPicPr>
+            <a:picLocks noChangeAspect="1"/>
+          </p:cNvPicPr>
+          <p:nvPr/>
+        </p:nvPicPr>
+        <p:blipFill>
+          <a:blip r:embed="rId2"/>
+          <a:stretch>
+            <a:fillRect/>
+          </a:stretch>
+        </p:blipFill>
+        <p:spPr>
+          <a:xfrm>
+            <a:off x="0" y="827088"/>
+            <a:ext cx="3302622" cy="5046530"/>
+          </a:xfrm>
+          <a:prstGeom prst="rect">
+            <a:avLst/>
+          </a:prstGeom>
+        </p:spPr>
+      </p:pic>
+      <p:pic>
+        <p:nvPicPr>
+          <p:cNvPr id="4" name="Picture 3">
+            <a:extLst>
+              <a:ext uri="{FF2B5EF4-FFF2-40B4-BE49-F238E27FC236}">
+                <a16:creationId xmlns:a16="http://schemas.microsoft.com/office/drawing/2014/main" id="{0424CF94-A711-F430-760F-4EF285ECA686}"/>
+              </a:ext>
+            </a:extLst>
+          </p:cNvPr>
+          <p:cNvPicPr>
+            <a:picLocks noChangeAspect="1"/>
+          </p:cNvPicPr>
+          <p:nvPr/>
+        </p:nvPicPr>
+        <p:blipFill>
+          <a:blip r:embed="rId3"/>
+          <a:stretch>
+            <a:fillRect/>
+          </a:stretch>
+        </p:blipFill>
+        <p:spPr>
+          <a:xfrm>
+            <a:off x="3055165" y="52001"/>
+            <a:ext cx="5455022" cy="3577942"/>
+          </a:xfrm>
+          <a:prstGeom prst="rect">
+            <a:avLst/>
+          </a:prstGeom>
+        </p:spPr>
+      </p:pic>
+      <p:pic>
+        <p:nvPicPr>
+          <p:cNvPr id="6" name="Picture 5">
+            <a:extLst>
+              <a:ext uri="{FF2B5EF4-FFF2-40B4-BE49-F238E27FC236}">
+                <a16:creationId xmlns:a16="http://schemas.microsoft.com/office/drawing/2014/main" id="{4A1A733F-EBD8-B63F-3FFE-682178D3DC44}"/>
+              </a:ext>
+            </a:extLst>
+          </p:cNvPr>
+          <p:cNvPicPr>
+            <a:picLocks noChangeAspect="1"/>
+          </p:cNvPicPr>
+          <p:nvPr/>
+        </p:nvPicPr>
+        <p:blipFill>
+          <a:blip r:embed="rId4"/>
+          <a:stretch>
+            <a:fillRect/>
+          </a:stretch>
+        </p:blipFill>
+        <p:spPr>
+          <a:xfrm>
+            <a:off x="2999569" y="3150772"/>
+            <a:ext cx="5566214" cy="3707228"/>
+          </a:xfrm>
+          <a:prstGeom prst="rect">
+            <a:avLst/>
+          </a:prstGeom>
+        </p:spPr>
+      </p:pic>
+      <p:pic>
+        <p:nvPicPr>
+          <p:cNvPr id="10" name="Picture 9">
+            <a:extLst>
+              <a:ext uri="{FF2B5EF4-FFF2-40B4-BE49-F238E27FC236}">
+                <a16:creationId xmlns:a16="http://schemas.microsoft.com/office/drawing/2014/main" id="{3FA23F91-4483-234C-8C69-53C086106FCC}"/>
+              </a:ext>
+            </a:extLst>
+          </p:cNvPr>
+          <p:cNvPicPr>
+            <a:picLocks noChangeAspect="1"/>
+          </p:cNvPicPr>
+          <p:nvPr/>
+        </p:nvPicPr>
+        <p:blipFill>
+          <a:blip r:embed="rId5"/>
+          <a:stretch>
+            <a:fillRect/>
+          </a:stretch>
+        </p:blipFill>
+        <p:spPr>
+          <a:xfrm>
+            <a:off x="8510187" y="1014555"/>
+            <a:ext cx="3834744" cy="5230776"/>
+          </a:xfrm>
+          <a:prstGeom prst="rect">
+            <a:avLst/>
+          </a:prstGeom>
+        </p:spPr>
+      </p:pic>
+    </p:spTree>
+    <p:extLst>
+      <p:ext uri="{BB962C8B-B14F-4D97-AF65-F5344CB8AC3E}">
+        <p14:creationId xmlns:p14="http://schemas.microsoft.com/office/powerpoint/2010/main" val="2417633127"/>
+      </p:ext>
+    </p:extLst>
+  </p:cSld>
+  <p:clrMapOvr>
+    <a:masterClrMapping/>
+  </p:clrMapOvr>
+</p:sld>
+</file>
+
+<file path=ppt/slides/slide3.xml><?xml version="1.0" encoding="utf-8"?>
+<p:sld xmlns:a="http://schemas.openxmlformats.org/drawingml/2006/main" xmlns:r="http://schemas.openxmlformats.org/officeDocument/2006/relationships" xmlns:p="http://schemas.openxmlformats.org/presentationml/2006/main">
+  <p:cSld>
+    <p:spTree>
+      <p:nvGrpSpPr>
+        <p:cNvPr id="1" name=""/>
+        <p:cNvGrpSpPr/>
+        <p:nvPr/>
+      </p:nvGrpSpPr>
+      <p:grpSpPr>
+        <a:xfrm>
+          <a:off x="0" y="0"/>
+          <a:ext cx="0" cy="0"/>
+          <a:chOff x="0" y="0"/>
+          <a:chExt cx="0" cy="0"/>
+        </a:xfrm>
+      </p:grpSpPr>
       <p:sp>
         <p:nvSpPr>
           <p:cNvPr id="2" name="Title 1">
@@ -4368,7 +4519,7 @@
 </p:sld>
 </file>
 
-<file path=ppt/slides/slide3.xml><?xml version="1.0" encoding="utf-8"?>
+<file path=ppt/slides/slide4.xml><?xml version="1.0" encoding="utf-8"?>
 <p:sld xmlns:a="http://schemas.openxmlformats.org/drawingml/2006/main" xmlns:r="http://schemas.openxmlformats.org/officeDocument/2006/relationships" xmlns:p="http://schemas.openxmlformats.org/presentationml/2006/main">
   <p:cSld>
     <p:spTree>
